--- a/slides/decks/L06-hybridsn.pptx
+++ b/slides/decks/L06-hybridsn.pptx
@@ -118,13 +118,13 @@
   <p:extLst>
     <p:ext uri="{521415D9-36F7-43E2-AB2F-B90AF26B5E84}">
       <p14:sectionLst xmlns:p14="http://schemas.microsoft.com/office/powerpoint/2010/main">
-        <p14:section name="开场" id="{c719a966-8cb5-dfe2-bfe9-b0bf68d151cf}">
+        <p14:section name="开场" id="{289728e9-c234-6582-fab7-ca786ad690e2}">
           <p14:sldIdLst>
             <p14:sldId id="256"/>
             <p14:sldId id="257"/>
           </p14:sldIdLst>
         </p14:section>
-        <p14:section name="讲解" id="{8c0d6e6e-3043-6a8b-730e-beac58142be3}">
+        <p14:section name="讲解" id="{b68b2762-5b60-5246-5cec-e9acf296df2a}">
           <p14:sldIdLst>
             <p14:sldId id="258"/>
             <p14:sldId id="259"/>
@@ -135,13 +135,13 @@
             <p14:sldId id="264"/>
           </p14:sldIdLst>
         </p14:section>
-        <p14:section name="练习" id="{bb741235-6312-8ff9-850e-31d7328ca880}">
+        <p14:section name="练习" id="{7a9e59d7-b985-155c-4362-a627e6eea165}">
           <p14:sldIdLst>
             <p14:sldId id="265"/>
             <p14:sldId id="266"/>
           </p14:sldIdLst>
         </p14:section>
-        <p14:section name="收束" id="{06a13785-6d28-1b70-d415-0836c9fa29ba}">
+        <p14:section name="收束" id="{afda1bf8-1c35-403a-ee0e-8ab4a3fce284}">
           <p14:sldIdLst>
             <p14:sldId id="267"/>
           </p14:sldIdLst>
